--- a/COMP3020-Poster.pptx
+++ b/COMP3020-Poster.pptx
@@ -121,6 +121,43 @@
     </p:ext>
   </p:extLst>
 </p:presentation>
+</file>
+
+<file path=ppt/revisionInfo.xml><?xml version="1.0" encoding="utf-8"?>
+<p1510:revInfo xmlns:a="http://schemas.openxmlformats.org/drawingml/2006/main" xmlns:r="http://schemas.openxmlformats.org/officeDocument/2006/relationships" xmlns:p1510="http://schemas.microsoft.com/office/powerpoint/2015/10/main">
+  <p1510:revLst>
+    <p1510:client id="{70970B39-5BE5-4887-8E9F-AF901151EC13}" v="2" dt="2026-10-09T12:41:33.943"/>
+  </p1510:revLst>
+</p1510:revInfo>
+</file>
+
+<file path=ppt/changesInfos/changesInfo1.xml><?xml version="1.0" encoding="utf-8"?>
+<pc:chgInfo xmlns:a="http://schemas.openxmlformats.org/drawingml/2006/main" xmlns:r="http://schemas.openxmlformats.org/officeDocument/2006/relationships" xmlns:ac="http://schemas.microsoft.com/office/drawing/2013/main/command" xmlns:pc="http://schemas.microsoft.com/office/powerpoint/2013/main/command">
+  <pc:docChgLst>
+    <pc:chgData name="Nghi Nghi" userId="6fc7a3112a5e14f7" providerId="LiveId" clId="{71652CA2-B17B-4E19-A539-757C3419E075}"/>
+    <pc:docChg chg="modSld">
+      <pc:chgData name="Nghi Nghi" userId="6fc7a3112a5e14f7" providerId="LiveId" clId="{71652CA2-B17B-4E19-A539-757C3419E075}" dt="2026-10-09T12:41:33.858" v="1" actId="20577"/>
+      <pc:docMkLst>
+        <pc:docMk/>
+      </pc:docMkLst>
+      <pc:sldChg chg="modSp mod">
+        <pc:chgData name="Nghi Nghi" userId="6fc7a3112a5e14f7" providerId="LiveId" clId="{71652CA2-B17B-4E19-A539-757C3419E075}" dt="2026-10-09T12:41:33.858" v="1" actId="20577"/>
+        <pc:sldMkLst>
+          <pc:docMk/>
+          <pc:sldMk cId="0" sldId="256"/>
+        </pc:sldMkLst>
+        <pc:spChg chg="mod">
+          <ac:chgData name="Nghi Nghi" userId="6fc7a3112a5e14f7" providerId="LiveId" clId="{71652CA2-B17B-4E19-A539-757C3419E075}" dt="2026-10-09T12:41:33.858" v="1" actId="20577"/>
+          <ac:spMkLst>
+            <pc:docMk/>
+            <pc:sldMk cId="0" sldId="256"/>
+            <ac:spMk id="69" creationId="{00000000-0000-0000-0000-000000000000}"/>
+          </ac:spMkLst>
+        </pc:spChg>
+      </pc:sldChg>
+    </pc:docChg>
+  </pc:docChgLst>
+</pc:chgInfo>
 </file>
 
 <file path=ppt/slideLayouts/slideLayout1.xml><?xml version="1.0" encoding="utf-8"?>
@@ -6656,35 +6693,51 @@
             </a:r>
           </a:p>
           <a:p>
-            <a:pPr algn="l">
+            <a:pPr>
               <a:spcAft>
                 <a:spcPts val="1000"/>
               </a:spcAft>
             </a:pPr>
             <a:r>
-              <a:rPr sz="1900" b="0" dirty="0">
+              <a:rPr lang="vi-VN" sz="1900">
                 <a:solidFill>
                   <a:srgbClr val="222B38"/>
                 </a:solidFill>
                 <a:latin typeface="Calibri"/>
-              </a:rPr>
-              <a:t>[paste link here]</a:t>
-            </a:r>
-          </a:p>
-          <a:p>
-            <a:pPr algn="l">
+                <a:hlinkClick r:id="rId7"/>
+              </a:rPr>
+              <a:t>https://github.com/lexi15-k/steamproj.git</a:t>
+            </a:r>
+            <a:endParaRPr lang="vi-VN" sz="1900">
+              <a:solidFill>
+                <a:srgbClr val="222B38"/>
+              </a:solidFill>
+              <a:latin typeface="Calibri"/>
+            </a:endParaRPr>
+          </a:p>
+          <a:p>
+            <a:pPr>
               <a:spcAft>
-                <a:spcPts val="0"/>
+                <a:spcPts val="1000"/>
               </a:spcAft>
             </a:pPr>
             <a:r>
+              <a:rPr sz="1900" b="0">
+                <a:solidFill>
+                  <a:srgbClr val="222B38"/>
+                </a:solidFill>
+                <a:latin typeface="Calibri"/>
+              </a:rPr>
+              <a:t>Python</a:t>
+            </a:r>
+            <a:r>
               <a:rPr sz="1900" b="0" dirty="0">
                 <a:solidFill>
                   <a:srgbClr val="222B38"/>
                 </a:solidFill>
                 <a:latin typeface="Calibri"/>
               </a:rPr>
-              <a:t>Python: data collection. R: tm, </a:t>
+              <a:t>: data collection. R: tm, </a:t>
             </a:r>
             <a:r>
               <a:rPr sz="1900" b="0" dirty="0" err="1">
@@ -6722,7 +6775,7 @@
           <p:nvPr/>
         </p:nvPicPr>
         <p:blipFill>
-          <a:blip r:embed="rId7"/>
+          <a:blip r:embed="rId8"/>
           <a:stretch>
             <a:fillRect/>
           </a:stretch>
